--- a/Drone_Racing_Progress_Presentation.pptx
+++ b/Drone_Racing_Progress_Presentation.pptx
@@ -121,14 +121,6 @@
     </p:ext>
   </p:extLst>
 </p:presentation>
-</file>
-
-<file path=ppt/revisionInfo.xml><?xml version="1.0" encoding="utf-8"?>
-<p1510:revInfo xmlns:a="http://schemas.openxmlformats.org/drawingml/2006/main" xmlns:r="http://schemas.openxmlformats.org/officeDocument/2006/relationships" xmlns:p1510="http://schemas.microsoft.com/office/powerpoint/2015/10/main">
-  <p1510:revLst>
-    <p1510:client id="{A601996C-A154-4116-B6A6-13EF5799BAAE}" v="60" dt="2026-06-09T16:46:11.424"/>
-  </p1510:revLst>
-</p1510:revInfo>
 </file>
 
 <file path=ppt/notesMasters/notesMaster1.xml><?xml version="1.0" encoding="utf-8"?>
@@ -301,8 +293,150 @@
           <a:lstStyle/>
           <a:p>
             <a:r>
-              <a:t>Good afternoon. Our praktikum task was autonomous drone racing: flying a Crazyflie quadrotor through a course of four gates and around four obstacles, as fast as possible, without ever clipping a rotor. Importantly, everything we show today runs on the real hardware, not only in simulation. I will cover our system architecture and how the drone actually flies; then my colleague takes over for perception, our results, and the plan. Let us start with the big picture.  [~15 s — Presenter A]</a:t>
-            </a:r>
+              <a:rPr dirty="0"/>
+              <a:t>Good afternoon</a:t>
+            </a:r>
+            <a:r>
+              <a:rPr lang="tr-TR" dirty="0"/>
+              <a:t> </a:t>
+            </a:r>
+            <a:r>
+              <a:rPr lang="tr-TR" dirty="0" err="1"/>
+              <a:t>everybody</a:t>
+            </a:r>
+            <a:r>
+              <a:rPr lang="tr-TR" dirty="0"/>
+              <a:t>. My name is Arda </a:t>
+            </a:r>
+            <a:r>
+              <a:rPr lang="tr-TR" dirty="0" err="1"/>
+              <a:t>and</a:t>
+            </a:r>
+            <a:r>
+              <a:rPr lang="tr-TR" dirty="0"/>
+              <a:t> </a:t>
+            </a:r>
+            <a:r>
+              <a:rPr lang="tr-TR" dirty="0" err="1"/>
+              <a:t>this</a:t>
+            </a:r>
+            <a:r>
+              <a:rPr lang="tr-TR" dirty="0"/>
+              <a:t> is </a:t>
+            </a:r>
+            <a:r>
+              <a:rPr lang="tr-TR" dirty="0" err="1"/>
+              <a:t>my</a:t>
+            </a:r>
+            <a:r>
+              <a:rPr lang="tr-TR" dirty="0"/>
+              <a:t> </a:t>
+            </a:r>
+            <a:r>
+              <a:rPr lang="tr-TR" dirty="0" err="1"/>
+              <a:t>team</a:t>
+            </a:r>
+            <a:r>
+              <a:rPr lang="tr-TR" dirty="0"/>
+              <a:t> </a:t>
+            </a:r>
+            <a:r>
+              <a:rPr lang="tr-TR" dirty="0" err="1"/>
+              <a:t>mate</a:t>
+            </a:r>
+            <a:r>
+              <a:rPr lang="tr-TR" dirty="0"/>
+              <a:t> Deniz. </a:t>
+            </a:r>
+            <a:r>
+              <a:rPr lang="tr-TR" dirty="0" err="1"/>
+              <a:t>Today</a:t>
+            </a:r>
+            <a:r>
+              <a:rPr lang="tr-TR" dirty="0"/>
+              <a:t> </a:t>
+            </a:r>
+            <a:r>
+              <a:rPr lang="tr-TR" dirty="0" err="1"/>
+              <a:t>we</a:t>
+            </a:r>
+            <a:r>
+              <a:rPr lang="tr-TR" dirty="0"/>
+              <a:t> </a:t>
+            </a:r>
+            <a:r>
+              <a:rPr lang="tr-TR" dirty="0" err="1"/>
+              <a:t>are</a:t>
+            </a:r>
+            <a:r>
+              <a:rPr lang="tr-TR" dirty="0"/>
+              <a:t> </a:t>
+            </a:r>
+            <a:r>
+              <a:rPr lang="tr-TR" dirty="0" err="1"/>
+              <a:t>going</a:t>
+            </a:r>
+            <a:r>
+              <a:rPr lang="tr-TR" dirty="0"/>
+              <a:t> </a:t>
+            </a:r>
+            <a:r>
+              <a:rPr lang="tr-TR" dirty="0" err="1"/>
+              <a:t>to</a:t>
+            </a:r>
+            <a:r>
+              <a:rPr lang="tr-TR" dirty="0"/>
+              <a:t> talk </a:t>
+            </a:r>
+            <a:r>
+              <a:rPr lang="tr-TR" dirty="0" err="1"/>
+              <a:t>about</a:t>
+            </a:r>
+            <a:r>
+              <a:rPr lang="tr-TR" dirty="0"/>
+              <a:t> </a:t>
+            </a:r>
+            <a:r>
+              <a:rPr lang="tr-TR" dirty="0" err="1"/>
+              <a:t>the</a:t>
+            </a:r>
+            <a:r>
+              <a:rPr lang="tr-TR" dirty="0"/>
+              <a:t> </a:t>
+            </a:r>
+            <a:r>
+              <a:rPr lang="tr-TR" dirty="0" err="1"/>
+              <a:t>methodology</a:t>
+            </a:r>
+            <a:r>
+              <a:rPr lang="tr-TR" dirty="0"/>
+              <a:t> </a:t>
+            </a:r>
+            <a:r>
+              <a:rPr lang="tr-TR" dirty="0" err="1"/>
+              <a:t>and</a:t>
+            </a:r>
+            <a:r>
+              <a:rPr lang="tr-TR" dirty="0"/>
+              <a:t> </a:t>
+            </a:r>
+            <a:r>
+              <a:rPr lang="tr-TR" dirty="0" err="1"/>
+              <a:t>progress</a:t>
+            </a:r>
+            <a:r>
+              <a:rPr lang="tr-TR" dirty="0"/>
+              <a:t> of </a:t>
+            </a:r>
+            <a:r>
+              <a:rPr lang="tr-TR" dirty="0" err="1"/>
+              <a:t>our</a:t>
+            </a:r>
+            <a:r>
+              <a:rPr lang="tr-TR" dirty="0"/>
+              <a:t> Project. </a:t>
+            </a:r>
+            <a:endParaRPr dirty="0"/>
           </a:p>
         </p:txBody>
       </p:sp>
